--- a/classes/parte-5-explotacion-de-sistemas-y-binarios/126-explotacion-de-heap-fundamentos/clase-126-presentacion.pptx
+++ b/classes/parte-5-explotacion-de-sistemas-y-binarios/126-explotacion-de-heap-fundamentos/clase-126-presentacion.pptx
@@ -17,6 +17,9 @@
     <p:sldId id="265" r:id="rId16"/>
     <p:sldId id="266" r:id="rId17"/>
     <p:sldId id="267" r:id="rId18"/>
+    <p:sldId id="268" r:id="rId19"/>
+    <p:sldId id="269" r:id="rId20"/>
+    <p:sldId id="270" r:id="rId21"/>
   </p:sldIdLst>
   <p:sldSz cx="9144000" cy="6858000" type="screen4x3"/>
   <p:notesSz cx="6858000" cy="9144000"/>
@@ -3198,7 +3201,7 @@
                   <a:srgbClr val="0B3D2E"/>
                 </a:solidFill>
               </a:rPr>
-              <a:t>⚠️ Errores comunes</a:t>
+              <a:t>✍️ Ejercicios</a:t>
             </a:r>
           </a:p>
         </p:txBody>
@@ -3236,67 +3239,82 @@
                   <a:srgbClr val="22282E"/>
                 </a:solidFill>
               </a:rPr>
-              <a:t>•  No ves tcache — glibc antigua (&lt;2.26); revisa versión</a:t>
-            </a:r>
-          </a:p>
-          <a:p>
-            <a:pPr>
-              <a:spcAft>
-                <a:spcPts val="600"/>
-              </a:spcAft>
-            </a:pPr>
-            <a:r>
-              <a:rPr sz="1500">
-                <a:solidFill>
-                  <a:srgbClr val="22282E"/>
-                </a:solidFill>
-              </a:rPr>
-              <a:t>•  size "raro" (+1) — El bit PREVINUSE está puesto; enmascara con &amp; ~0x7</a:t>
-            </a:r>
-          </a:p>
-          <a:p>
-            <a:pPr>
-              <a:spcAft>
-                <a:spcPts val="600"/>
-              </a:spcAft>
-            </a:pPr>
-            <a:r>
-              <a:rPr sz="1500">
-                <a:solidFill>
-                  <a:srgbClr val="22282E"/>
-                </a:solidFill>
-              </a:rPr>
-              <a:t>•  Chunks no se consolidan — tcache/fastbin no consolidan; usa tamaños mayores</a:t>
-            </a:r>
-          </a:p>
-          <a:p>
-            <a:pPr>
-              <a:spcAft>
-                <a:spcPts val="600"/>
-              </a:spcAft>
-            </a:pPr>
-            <a:r>
-              <a:rPr sz="1500">
-                <a:solidFill>
-                  <a:srgbClr val="22282E"/>
-                </a:solidFill>
-              </a:rPr>
-              <a:t>•  Direcciones cambian — ASLR; desactívalo para estudiar el layout</a:t>
-            </a:r>
-          </a:p>
-          <a:p>
-            <a:pPr>
-              <a:spcAft>
-                <a:spcPts val="600"/>
-              </a:spcAft>
-            </a:pPr>
-            <a:r>
-              <a:rPr sz="1500">
-                <a:solidFill>
-                  <a:srgbClr val="22282E"/>
-                </a:solidFill>
-              </a:rPr>
-              <a:t>•  Confundir datos con metadatos — El usuario ve el puntero a datos, no a la cabecera</a:t>
+              <a:t>•  Dibuja el layout de dos chunks contiguos indicando dónde está size de cada uno.</a:t>
+            </a:r>
+          </a:p>
+          <a:p>
+            <a:pPr>
+              <a:spcAft>
+                <a:spcPts val="600"/>
+              </a:spcAft>
+            </a:pPr>
+            <a:r>
+              <a:rPr sz="1500">
+                <a:solidFill>
+                  <a:srgbClr val="22282E"/>
+                </a:solidFill>
+              </a:rPr>
+              <a:t>•  Muestra con pwndbg el contenido del tcache tras liberar 3 chunks iguales.</a:t>
+            </a:r>
+          </a:p>
+          <a:p>
+            <a:pPr>
+              <a:spcAft>
+                <a:spcPts val="600"/>
+              </a:spcAft>
+            </a:pPr>
+            <a:r>
+              <a:rPr sz="1500">
+                <a:solidFill>
+                  <a:srgbClr val="22282E"/>
+                </a:solidFill>
+              </a:rPr>
+              <a:t>•  Explica por qué tcache es LIFO y qué implica para la reutilización.</a:t>
+            </a:r>
+          </a:p>
+          <a:p>
+            <a:pPr>
+              <a:spcAft>
+                <a:spcPts val="600"/>
+              </a:spcAft>
+            </a:pPr>
+            <a:r>
+              <a:rPr sz="1500">
+                <a:solidFill>
+                  <a:srgbClr val="22282E"/>
+                </a:solidFill>
+              </a:rPr>
+              <a:t>•  Reserva un chunk &gt; 0x408 y observa a qué bin va al liberarlo.</a:t>
+            </a:r>
+          </a:p>
+          <a:p>
+            <a:pPr>
+              <a:spcAft>
+                <a:spcPts val="600"/>
+              </a:spcAft>
+            </a:pPr>
+            <a:r>
+              <a:rPr sz="1500">
+                <a:solidFill>
+                  <a:srgbClr val="22282E"/>
+                </a:solidFill>
+              </a:rPr>
+              <a:t>•  Localiza el top chunk y su size en visheapchunks.</a:t>
+            </a:r>
+          </a:p>
+          <a:p>
+            <a:pPr>
+              <a:spcAft>
+                <a:spcPts val="600"/>
+              </a:spcAft>
+            </a:pPr>
+            <a:r>
+              <a:rPr sz="1500">
+                <a:solidFill>
+                  <a:srgbClr val="22282E"/>
+                </a:solidFill>
+              </a:rPr>
+              <a:t>•  Identifica el next de un chunk en tcache (dónde apunta).</a:t>
             </a:r>
           </a:p>
         </p:txBody>
@@ -3347,7 +3365,7 @@
                   <a:srgbClr val="0B3D2E"/>
                 </a:solidFill>
               </a:rPr>
-              <a:t>❓ Preguntas frecuentes</a:t>
+              <a:t>📝 Reto verificable</a:t>
             </a:r>
           </a:p>
         </p:txBody>
@@ -3385,82 +3403,52 @@
                   <a:srgbClr val="22282E"/>
                 </a:solidFill>
               </a:rPr>
-              <a:t>•  ❓ ¿Por qué estudiar glibc y no otro asignador? Es el más común en Linux/CTF. jemalloc/tcmalloc</a:t>
-            </a:r>
-          </a:p>
-          <a:p>
-            <a:pPr>
-              <a:spcAft>
-                <a:spcPts val="600"/>
-              </a:spcAft>
-            </a:pPr>
-            <a:r>
-              <a:rPr sz="1500">
-                <a:solidFill>
-                  <a:srgbClr val="22282E"/>
-                </a:solidFill>
-              </a:rPr>
-              <a:t>•  tienen internals distintos.</a:t>
-            </a:r>
-          </a:p>
-          <a:p>
-            <a:pPr>
-              <a:spcAft>
-                <a:spcPts val="600"/>
-              </a:spcAft>
-            </a:pPr>
-            <a:r>
-              <a:rPr sz="1500">
-                <a:solidFill>
-                  <a:srgbClr val="22282E"/>
-                </a:solidFill>
-              </a:rPr>
-              <a:t>•  ❓ ¿El tamaño que pido es el tamaño del chunk? No: se redondea e incluye metadatos; malloc(0x30)</a:t>
-            </a:r>
-          </a:p>
-          <a:p>
-            <a:pPr>
-              <a:spcAft>
-                <a:spcPts val="600"/>
-              </a:spcAft>
-            </a:pPr>
-            <a:r>
-              <a:rPr sz="1500">
-                <a:solidFill>
-                  <a:srgbClr val="22282E"/>
-                </a:solidFill>
-              </a:rPr>
-              <a:t>•  suele dar un chunk de 0x40.</a:t>
-            </a:r>
-          </a:p>
-          <a:p>
-            <a:pPr>
-              <a:spcAft>
-                <a:spcPts val="600"/>
-              </a:spcAft>
-            </a:pPr>
-            <a:r>
-              <a:rPr sz="1500">
-                <a:solidFill>
-                  <a:srgbClr val="22282E"/>
-                </a:solidFill>
-              </a:rPr>
-              <a:t>•  ❓ ¿Necesito memorizar todos los bins? Domina tcache y fastbins primero; son los más explotados en</a:t>
-            </a:r>
-          </a:p>
-          <a:p>
-            <a:pPr>
-              <a:spcAft>
-                <a:spcPts val="600"/>
-              </a:spcAft>
-            </a:pPr>
-            <a:r>
-              <a:rPr sz="1500">
-                <a:solidFill>
-                  <a:srgbClr val="22282E"/>
-                </a:solidFill>
-              </a:rPr>
-              <a:t>•  glibc moderna.</a:t>
+              <a:t>•  Con un programa que reserve y libere varios chunks, demuestra en pwndbg que el tcache es LIFO</a:t>
+            </a:r>
+          </a:p>
+          <a:p>
+            <a:pPr>
+              <a:spcAft>
+                <a:spcPts val="600"/>
+              </a:spcAft>
+            </a:pPr>
+            <a:r>
+              <a:rPr sz="1500">
+                <a:solidFill>
+                  <a:srgbClr val="22282E"/>
+                </a:solidFill>
+              </a:rPr>
+              <a:t>•  prediciendo qué dirección devolverá el siguiente malloc.</a:t>
+            </a:r>
+          </a:p>
+          <a:p>
+            <a:pPr>
+              <a:spcAft>
+                <a:spcPts val="600"/>
+              </a:spcAft>
+            </a:pPr>
+            <a:r>
+              <a:rPr sz="1500">
+                <a:solidFill>
+                  <a:srgbClr val="22282E"/>
+                </a:solidFill>
+              </a:rPr>
+              <a:t>•  Criterio de aceptación: predices correctamente la dirección devuelta por un malloc posterior</a:t>
+            </a:r>
+          </a:p>
+          <a:p>
+            <a:pPr>
+              <a:spcAft>
+                <a:spcPts val="600"/>
+              </a:spcAft>
+            </a:pPr>
+            <a:r>
+              <a:rPr sz="1500">
+                <a:solidFill>
+                  <a:srgbClr val="22282E"/>
+                </a:solidFill>
+              </a:rPr>
+              <a:t>•  basándote en el estado del tcache mostrado por bins.</a:t>
             </a:r>
           </a:p>
         </p:txBody>
@@ -3511,7 +3499,7 @@
                   <a:srgbClr val="0B3D2E"/>
                 </a:solidFill>
               </a:rPr>
-              <a:t>🔗 Referencias</a:t>
+              <a:t>⚠️ Errores comunes</a:t>
             </a:r>
           </a:p>
         </p:txBody>
@@ -3549,6 +3537,319 @@
                   <a:srgbClr val="22282E"/>
                 </a:solidFill>
               </a:rPr>
+              <a:t>•  No ves tcache — glibc antigua (&lt;2.26); revisa versión</a:t>
+            </a:r>
+          </a:p>
+          <a:p>
+            <a:pPr>
+              <a:spcAft>
+                <a:spcPts val="600"/>
+              </a:spcAft>
+            </a:pPr>
+            <a:r>
+              <a:rPr sz="1500">
+                <a:solidFill>
+                  <a:srgbClr val="22282E"/>
+                </a:solidFill>
+              </a:rPr>
+              <a:t>•  size "raro" (+1) — El bit PREVINUSE está puesto; enmascara con &amp; ~0x7</a:t>
+            </a:r>
+          </a:p>
+          <a:p>
+            <a:pPr>
+              <a:spcAft>
+                <a:spcPts val="600"/>
+              </a:spcAft>
+            </a:pPr>
+            <a:r>
+              <a:rPr sz="1500">
+                <a:solidFill>
+                  <a:srgbClr val="22282E"/>
+                </a:solidFill>
+              </a:rPr>
+              <a:t>•  Chunks no se consolidan — tcache/fastbin no consolidan; usa tamaños mayores</a:t>
+            </a:r>
+          </a:p>
+          <a:p>
+            <a:pPr>
+              <a:spcAft>
+                <a:spcPts val="600"/>
+              </a:spcAft>
+            </a:pPr>
+            <a:r>
+              <a:rPr sz="1500">
+                <a:solidFill>
+                  <a:srgbClr val="22282E"/>
+                </a:solidFill>
+              </a:rPr>
+              <a:t>•  Direcciones cambian — ASLR; desactívalo para estudiar el layout</a:t>
+            </a:r>
+          </a:p>
+          <a:p>
+            <a:pPr>
+              <a:spcAft>
+                <a:spcPts val="600"/>
+              </a:spcAft>
+            </a:pPr>
+            <a:r>
+              <a:rPr sz="1500">
+                <a:solidFill>
+                  <a:srgbClr val="22282E"/>
+                </a:solidFill>
+              </a:rPr>
+              <a:t>•  Confundir datos con metadatos — El usuario ve el puntero a datos, no a la cabecera</a:t>
+            </a:r>
+          </a:p>
+        </p:txBody>
+      </p:sp>
+    </p:spTree>
+  </p:cSld>
+  <p:clrMapOvr>
+    <a:masterClrMapping/>
+  </p:clrMapOvr>
+</p:sld>
+</file>
+
+<file path=ppt/slides/slide13.xml><?xml version="1.0" encoding="utf-8"?>
+<p:sld xmlns:a="http://schemas.openxmlformats.org/drawingml/2006/main" xmlns:p="http://schemas.openxmlformats.org/presentationml/2006/main" xmlns:r="http://schemas.openxmlformats.org/officeDocument/2006/relationships">
+  <p:cSld>
+    <p:spTree>
+      <p:nvGrpSpPr>
+        <p:cNvPr id="1" name=""/>
+        <p:cNvGrpSpPr/>
+        <p:nvPr/>
+      </p:nvGrpSpPr>
+      <p:grpSpPr/>
+      <p:sp>
+        <p:nvSpPr>
+          <p:cNvPr id="2" name="TextBox 1"/>
+          <p:cNvSpPr txBox="1"/>
+          <p:nvPr/>
+        </p:nvSpPr>
+        <p:spPr>
+          <a:xfrm>
+            <a:off x="457200" y="320040"/>
+            <a:ext cx="8229600" cy="822960"/>
+          </a:xfrm>
+          <a:prstGeom prst="rect">
+            <a:avLst/>
+          </a:prstGeom>
+          <a:noFill/>
+        </p:spPr>
+        <p:txBody>
+          <a:bodyPr wrap="square">
+            <a:spAutoFit/>
+          </a:bodyPr>
+          <a:lstStyle/>
+          <a:p>
+            <a:r>
+              <a:rPr sz="2600" b="1">
+                <a:solidFill>
+                  <a:srgbClr val="0B3D2E"/>
+                </a:solidFill>
+              </a:rPr>
+              <a:t>❓ Preguntas frecuentes</a:t>
+            </a:r>
+          </a:p>
+        </p:txBody>
+      </p:sp>
+      <p:sp>
+        <p:nvSpPr>
+          <p:cNvPr id="3" name="TextBox 2"/>
+          <p:cNvSpPr txBox="1"/>
+          <p:nvPr/>
+        </p:nvSpPr>
+        <p:spPr>
+          <a:xfrm>
+            <a:off x="457200" y="1280160"/>
+            <a:ext cx="8229600" cy="4937760"/>
+          </a:xfrm>
+          <a:prstGeom prst="rect">
+            <a:avLst/>
+          </a:prstGeom>
+          <a:noFill/>
+        </p:spPr>
+        <p:txBody>
+          <a:bodyPr wrap="square">
+            <a:spAutoFit/>
+          </a:bodyPr>
+          <a:lstStyle/>
+          <a:p>
+            <a:pPr>
+              <a:spcAft>
+                <a:spcPts val="600"/>
+              </a:spcAft>
+            </a:pPr>
+            <a:r>
+              <a:rPr sz="1500">
+                <a:solidFill>
+                  <a:srgbClr val="22282E"/>
+                </a:solidFill>
+              </a:rPr>
+              <a:t>•  ❓ ¿Por qué estudiar glibc y no otro asignador? Es el más común en Linux/CTF. jemalloc/tcmalloc</a:t>
+            </a:r>
+          </a:p>
+          <a:p>
+            <a:pPr>
+              <a:spcAft>
+                <a:spcPts val="600"/>
+              </a:spcAft>
+            </a:pPr>
+            <a:r>
+              <a:rPr sz="1500">
+                <a:solidFill>
+                  <a:srgbClr val="22282E"/>
+                </a:solidFill>
+              </a:rPr>
+              <a:t>•  tienen internals distintos.</a:t>
+            </a:r>
+          </a:p>
+          <a:p>
+            <a:pPr>
+              <a:spcAft>
+                <a:spcPts val="600"/>
+              </a:spcAft>
+            </a:pPr>
+            <a:r>
+              <a:rPr sz="1500">
+                <a:solidFill>
+                  <a:srgbClr val="22282E"/>
+                </a:solidFill>
+              </a:rPr>
+              <a:t>•  ❓ ¿El tamaño que pido es el tamaño del chunk? No: se redondea e incluye metadatos; malloc(0x30)</a:t>
+            </a:r>
+          </a:p>
+          <a:p>
+            <a:pPr>
+              <a:spcAft>
+                <a:spcPts val="600"/>
+              </a:spcAft>
+            </a:pPr>
+            <a:r>
+              <a:rPr sz="1500">
+                <a:solidFill>
+                  <a:srgbClr val="22282E"/>
+                </a:solidFill>
+              </a:rPr>
+              <a:t>•  suele dar un chunk de 0x40.</a:t>
+            </a:r>
+          </a:p>
+          <a:p>
+            <a:pPr>
+              <a:spcAft>
+                <a:spcPts val="600"/>
+              </a:spcAft>
+            </a:pPr>
+            <a:r>
+              <a:rPr sz="1500">
+                <a:solidFill>
+                  <a:srgbClr val="22282E"/>
+                </a:solidFill>
+              </a:rPr>
+              <a:t>•  ❓ ¿Necesito memorizar todos los bins? Domina tcache y fastbins primero; son los más explotados en</a:t>
+            </a:r>
+          </a:p>
+          <a:p>
+            <a:pPr>
+              <a:spcAft>
+                <a:spcPts val="600"/>
+              </a:spcAft>
+            </a:pPr>
+            <a:r>
+              <a:rPr sz="1500">
+                <a:solidFill>
+                  <a:srgbClr val="22282E"/>
+                </a:solidFill>
+              </a:rPr>
+              <a:t>•  glibc moderna.</a:t>
+            </a:r>
+          </a:p>
+        </p:txBody>
+      </p:sp>
+    </p:spTree>
+  </p:cSld>
+  <p:clrMapOvr>
+    <a:masterClrMapping/>
+  </p:clrMapOvr>
+</p:sld>
+</file>
+
+<file path=ppt/slides/slide14.xml><?xml version="1.0" encoding="utf-8"?>
+<p:sld xmlns:a="http://schemas.openxmlformats.org/drawingml/2006/main" xmlns:p="http://schemas.openxmlformats.org/presentationml/2006/main" xmlns:r="http://schemas.openxmlformats.org/officeDocument/2006/relationships">
+  <p:cSld>
+    <p:spTree>
+      <p:nvGrpSpPr>
+        <p:cNvPr id="1" name=""/>
+        <p:cNvGrpSpPr/>
+        <p:nvPr/>
+      </p:nvGrpSpPr>
+      <p:grpSpPr/>
+      <p:sp>
+        <p:nvSpPr>
+          <p:cNvPr id="2" name="TextBox 1"/>
+          <p:cNvSpPr txBox="1"/>
+          <p:nvPr/>
+        </p:nvSpPr>
+        <p:spPr>
+          <a:xfrm>
+            <a:off x="457200" y="320040"/>
+            <a:ext cx="8229600" cy="822960"/>
+          </a:xfrm>
+          <a:prstGeom prst="rect">
+            <a:avLst/>
+          </a:prstGeom>
+          <a:noFill/>
+        </p:spPr>
+        <p:txBody>
+          <a:bodyPr wrap="square">
+            <a:spAutoFit/>
+          </a:bodyPr>
+          <a:lstStyle/>
+          <a:p>
+            <a:r>
+              <a:rPr sz="2600" b="1">
+                <a:solidFill>
+                  <a:srgbClr val="0B3D2E"/>
+                </a:solidFill>
+              </a:rPr>
+              <a:t>🔗 Referencias</a:t>
+            </a:r>
+          </a:p>
+        </p:txBody>
+      </p:sp>
+      <p:sp>
+        <p:nvSpPr>
+          <p:cNvPr id="3" name="TextBox 2"/>
+          <p:cNvSpPr txBox="1"/>
+          <p:nvPr/>
+        </p:nvSpPr>
+        <p:spPr>
+          <a:xfrm>
+            <a:off x="457200" y="1280160"/>
+            <a:ext cx="8229600" cy="4937760"/>
+          </a:xfrm>
+          <a:prstGeom prst="rect">
+            <a:avLst/>
+          </a:prstGeom>
+          <a:noFill/>
+        </p:spPr>
+        <p:txBody>
+          <a:bodyPr wrap="square">
+            <a:spAutoFit/>
+          </a:bodyPr>
+          <a:lstStyle/>
+          <a:p>
+            <a:pPr>
+              <a:spcAft>
+                <a:spcPts val="600"/>
+              </a:spcAft>
+            </a:pPr>
+            <a:r>
+              <a:rPr sz="1500">
+                <a:solidFill>
+                  <a:srgbClr val="22282E"/>
+                </a:solidFill>
+              </a:rPr>
               <a:t>•  The Shellcoder's Handbook, cap. de heap. Wiley.</a:t>
             </a:r>
           </a:p>
@@ -3599,6 +3900,81 @@
           </a:p>
         </p:txBody>
       </p:sp>
+    </p:spTree>
+  </p:cSld>
+  <p:clrMapOvr>
+    <a:masterClrMapping/>
+  </p:clrMapOvr>
+</p:sld>
+</file>
+
+<file path=ppt/slides/slide15.xml><?xml version="1.0" encoding="utf-8"?>
+<p:sld xmlns:a="http://schemas.openxmlformats.org/drawingml/2006/main" xmlns:p="http://schemas.openxmlformats.org/presentationml/2006/main" xmlns:r="http://schemas.openxmlformats.org/officeDocument/2006/relationships">
+  <p:cSld>
+    <p:spTree>
+      <p:nvGrpSpPr>
+        <p:cNvPr id="1" name=""/>
+        <p:cNvGrpSpPr/>
+        <p:nvPr/>
+      </p:nvGrpSpPr>
+      <p:grpSpPr/>
+      <p:sp>
+        <p:nvSpPr>
+          <p:cNvPr id="2" name="TextBox 1"/>
+          <p:cNvSpPr txBox="1"/>
+          <p:nvPr/>
+        </p:nvSpPr>
+        <p:spPr>
+          <a:xfrm>
+            <a:off x="457200" y="274320"/>
+            <a:ext cx="8229600" cy="640080"/>
+          </a:xfrm>
+          <a:prstGeom prst="rect">
+            <a:avLst/>
+          </a:prstGeom>
+          <a:noFill/>
+        </p:spPr>
+        <p:txBody>
+          <a:bodyPr wrap="square">
+            <a:spAutoFit/>
+          </a:bodyPr>
+          <a:lstStyle/>
+          <a:p>
+            <a:r>
+              <a:rPr sz="2200" b="1">
+                <a:solidFill>
+                  <a:srgbClr val="0B3D2E"/>
+                </a:solidFill>
+              </a:rPr>
+              <a:t>Diagrama de la clase</a:t>
+            </a:r>
+          </a:p>
+        </p:txBody>
+      </p:sp>
+      <p:pic>
+        <p:nvPicPr>
+          <p:cNvPr id="3" name="Picture 2" descr="efc7d22067560113.png"/>
+          <p:cNvPicPr>
+            <a:picLocks noChangeAspect="1"/>
+          </p:cNvPicPr>
+          <p:nvPr/>
+        </p:nvPicPr>
+        <p:blipFill>
+          <a:blip r:embed="rId2"/>
+          <a:stretch>
+            <a:fillRect/>
+          </a:stretch>
+        </p:blipFill>
+        <p:spPr>
+          <a:xfrm>
+            <a:off x="457200" y="1353312"/>
+            <a:ext cx="8229600" cy="4791456"/>
+          </a:xfrm>
+          <a:prstGeom prst="rect">
+            <a:avLst/>
+          </a:prstGeom>
+        </p:spPr>
+      </p:pic>
     </p:spTree>
   </p:cSld>
   <p:clrMapOvr>
@@ -4122,7 +4498,7 @@
                   <a:srgbClr val="0B3D2E"/>
                 </a:solidFill>
               </a:rPr>
-              <a:t>📖 Definiciones y características</a:t>
+              <a:t>🧠 Explicación en profundidad</a:t>
             </a:r>
           </a:p>
         </p:txBody>
@@ -4160,97 +4536,97 @@
                   <a:srgbClr val="22282E"/>
                 </a:solidFill>
               </a:rPr>
-              <a:t>•  Chunk: unidad de asignación del heap con cabecera (size) y datos. Clave: el bit PREVINUSE</a:t>
-            </a:r>
-          </a:p>
-          <a:p>
-            <a:pPr>
-              <a:spcAft>
-                <a:spcPts val="600"/>
-              </a:spcAft>
-            </a:pPr>
-            <a:r>
-              <a:rPr sz="1500">
-                <a:solidFill>
-                  <a:srgbClr val="22282E"/>
-                </a:solidFill>
-              </a:rPr>
-              <a:t>•  indica si el chunk previo está en uso.</a:t>
-            </a:r>
-          </a:p>
-          <a:p>
-            <a:pPr>
-              <a:spcAft>
-                <a:spcPts val="600"/>
-              </a:spcAft>
-            </a:pPr>
-            <a:r>
-              <a:rPr sz="1500">
-                <a:solidFill>
-                  <a:srgbClr val="22282E"/>
-                </a:solidFill>
-              </a:rPr>
-              <a:t>•  tcache: caché por-hilo de chunks liberados (glibc moderna). Clave: LIFO, con puntero next</a:t>
-            </a:r>
-          </a:p>
-          <a:p>
-            <a:pPr>
-              <a:spcAft>
-                <a:spcPts val="600"/>
-              </a:spcAft>
-            </a:pPr>
-            <a:r>
-              <a:rPr sz="1500">
-                <a:solidFill>
-                  <a:srgbClr val="22282E"/>
-                </a:solidFill>
-              </a:rPr>
-              <a:t>•  manipulable → tcache poisoning.</a:t>
-            </a:r>
-          </a:p>
-          <a:p>
-            <a:pPr>
-              <a:spcAft>
-                <a:spcPts val="600"/>
-              </a:spcAft>
-            </a:pPr>
-            <a:r>
-              <a:rPr sz="1500">
-                <a:solidFill>
-                  <a:srgbClr val="22282E"/>
-                </a:solidFill>
-              </a:rPr>
-              <a:t>•  fastbin: lista LIFO de chunks pequeños que no se consolidan de inmediato. Clave: histórico</a:t>
-            </a:r>
-          </a:p>
-          <a:p>
-            <a:pPr>
-              <a:spcAft>
-                <a:spcPts val="600"/>
-              </a:spcAft>
-            </a:pPr>
-            <a:r>
-              <a:rPr sz="1500">
-                <a:solidFill>
-                  <a:srgbClr val="22282E"/>
-                </a:solidFill>
-              </a:rPr>
-              <a:t>•  objetivo de fastbin dup.</a:t>
-            </a:r>
-          </a:p>
-          <a:p>
-            <a:pPr>
-              <a:spcAft>
-                <a:spcPts val="600"/>
-              </a:spcAft>
-            </a:pPr>
-            <a:r>
-              <a:rPr sz="1500">
-                <a:solidFill>
-                  <a:srgbClr val="22282E"/>
-                </a:solidFill>
-              </a:rPr>
-              <a:t>•  unsorted bin: lista temporal de chunks recién liberados antes de clasificarlos. Clave: filtra</a:t>
+              <a:t>•  Hasta ahora la explotación ha vivido en la pila. El heap es la otra gran región de memoria</a:t>
+            </a:r>
+          </a:p>
+          <a:p>
+            <a:pPr>
+              <a:spcAft>
+                <a:spcPts val="600"/>
+              </a:spcAft>
+            </a:pPr>
+            <a:r>
+              <a:rPr sz="1500">
+                <a:solidFill>
+                  <a:srgbClr val="22282E"/>
+                </a:solidFill>
+              </a:rPr>
+              <a:t>•  —la de la asignación dinámica, malloc/free en C, new/delete en C++— y tiene sus propias</a:t>
+            </a:r>
+          </a:p>
+          <a:p>
+            <a:pPr>
+              <a:spcAft>
+                <a:spcPts val="600"/>
+              </a:spcAft>
+            </a:pPr>
+            <a:r>
+              <a:rPr sz="1500">
+                <a:solidFill>
+                  <a:srgbClr val="22282E"/>
+                </a:solidFill>
+              </a:rPr>
+              <a:t>•  vulnerabilidades, más complejas pero igual de graves. La diferencia esencial: en la pila la</a:t>
+            </a:r>
+          </a:p>
+          <a:p>
+            <a:pPr>
+              <a:spcAft>
+                <a:spcPts val="600"/>
+              </a:spcAft>
+            </a:pPr>
+            <a:r>
+              <a:rPr sz="1500">
+                <a:solidFill>
+                  <a:srgbClr val="22282E"/>
+                </a:solidFill>
+              </a:rPr>
+              <a:t>•  disposición es rígida y la conoce el compilador; en el heap, el gestor de memoria (el</a:t>
+            </a:r>
+          </a:p>
+          <a:p>
+            <a:pPr>
+              <a:spcAft>
+                <a:spcPts val="600"/>
+              </a:spcAft>
+            </a:pPr>
+            <a:r>
+              <a:rPr sz="1500">
+                <a:solidFill>
+                  <a:srgbClr val="22282E"/>
+                </a:solidFill>
+              </a:rPr>
+              <a:t>•  allocator) decide dinámicamente dónde colocar cada asignación, siguiendo estructuras de datos</a:t>
+            </a:r>
+          </a:p>
+          <a:p>
+            <a:pPr>
+              <a:spcAft>
+                <a:spcPts val="600"/>
+              </a:spcAft>
+            </a:pPr>
+            <a:r>
+              <a:rPr sz="1500">
+                <a:solidFill>
+                  <a:srgbClr val="22282E"/>
+                </a:solidFill>
+              </a:rPr>
+              <a:t>•  internas que el atacante puede corromper y manipular. Entender esas estructuras es el</a:t>
+            </a:r>
+          </a:p>
+          <a:p>
+            <a:pPr>
+              <a:spcAft>
+                <a:spcPts val="600"/>
+              </a:spcAft>
+            </a:pPr>
+            <a:r>
+              <a:rPr sz="1500">
+                <a:solidFill>
+                  <a:srgbClr val="22282E"/>
+                </a:solidFill>
+              </a:rPr>
+              <a:t>•  prerrequisito de todo lo que sigue, porque la explotación de heap consiste en engañar al</a:t>
             </a:r>
           </a:p>
         </p:txBody>
@@ -4301,7 +4677,7 @@
                   <a:srgbClr val="0B3D2E"/>
                 </a:solidFill>
               </a:rPr>
-              <a:t>🧰 Herramientas y preparación</a:t>
+              <a:t>📖 Definiciones y características</a:t>
             </a:r>
           </a:p>
         </p:txBody>
@@ -4339,37 +4715,97 @@
                   <a:srgbClr val="22282E"/>
                 </a:solidFill>
               </a:rPr>
-              <a:t>•  pip install pwntools</a:t>
-            </a:r>
-          </a:p>
-          <a:p>
-            <a:pPr>
-              <a:spcAft>
-                <a:spcPts val="600"/>
-              </a:spcAft>
-            </a:pPr>
-            <a:r>
-              <a:rPr sz="1500">
-                <a:solidFill>
-                  <a:srgbClr val="22282E"/>
-                </a:solidFill>
-              </a:rPr>
-              <a:t>•  ldd --version | head -1</a:t>
-            </a:r>
-          </a:p>
-          <a:p>
-            <a:pPr>
-              <a:spcAft>
-                <a:spcPts val="600"/>
-              </a:spcAft>
-            </a:pPr>
-            <a:r>
-              <a:rPr sz="1500">
-                <a:solidFill>
-                  <a:srgbClr val="22282E"/>
-                </a:solidFill>
-              </a:rPr>
-              <a:t>•  Compila un programa de práctica que reserve y libere chunks con malloc/free.</a:t>
+              <a:t>•  Chunk: unidad de asignación del heap con cabecera (size) y datos. Clave: el bit PREVINUSE</a:t>
+            </a:r>
+          </a:p>
+          <a:p>
+            <a:pPr>
+              <a:spcAft>
+                <a:spcPts val="600"/>
+              </a:spcAft>
+            </a:pPr>
+            <a:r>
+              <a:rPr sz="1500">
+                <a:solidFill>
+                  <a:srgbClr val="22282E"/>
+                </a:solidFill>
+              </a:rPr>
+              <a:t>•  indica si el chunk previo está en uso.</a:t>
+            </a:r>
+          </a:p>
+          <a:p>
+            <a:pPr>
+              <a:spcAft>
+                <a:spcPts val="600"/>
+              </a:spcAft>
+            </a:pPr>
+            <a:r>
+              <a:rPr sz="1500">
+                <a:solidFill>
+                  <a:srgbClr val="22282E"/>
+                </a:solidFill>
+              </a:rPr>
+              <a:t>•  tcache: caché por-hilo de chunks liberados (glibc moderna). Clave: LIFO, con puntero next</a:t>
+            </a:r>
+          </a:p>
+          <a:p>
+            <a:pPr>
+              <a:spcAft>
+                <a:spcPts val="600"/>
+              </a:spcAft>
+            </a:pPr>
+            <a:r>
+              <a:rPr sz="1500">
+                <a:solidFill>
+                  <a:srgbClr val="22282E"/>
+                </a:solidFill>
+              </a:rPr>
+              <a:t>•  manipulable → tcache poisoning.</a:t>
+            </a:r>
+          </a:p>
+          <a:p>
+            <a:pPr>
+              <a:spcAft>
+                <a:spcPts val="600"/>
+              </a:spcAft>
+            </a:pPr>
+            <a:r>
+              <a:rPr sz="1500">
+                <a:solidFill>
+                  <a:srgbClr val="22282E"/>
+                </a:solidFill>
+              </a:rPr>
+              <a:t>•  fastbin: lista LIFO de chunks pequeños que no se consolidan de inmediato. Clave: histórico</a:t>
+            </a:r>
+          </a:p>
+          <a:p>
+            <a:pPr>
+              <a:spcAft>
+                <a:spcPts val="600"/>
+              </a:spcAft>
+            </a:pPr>
+            <a:r>
+              <a:rPr sz="1500">
+                <a:solidFill>
+                  <a:srgbClr val="22282E"/>
+                </a:solidFill>
+              </a:rPr>
+              <a:t>•  objetivo de fastbin dup.</a:t>
+            </a:r>
+          </a:p>
+          <a:p>
+            <a:pPr>
+              <a:spcAft>
+                <a:spcPts val="600"/>
+              </a:spcAft>
+            </a:pPr>
+            <a:r>
+              <a:rPr sz="1500">
+                <a:solidFill>
+                  <a:srgbClr val="22282E"/>
+                </a:solidFill>
+              </a:rPr>
+              <a:t>•  unsorted bin: lista temporal de chunks recién liberados antes de clasificarlos. Clave: filtra</a:t>
             </a:r>
           </a:p>
         </p:txBody>
@@ -4420,7 +4856,7 @@
                   <a:srgbClr val="0B3D2E"/>
                 </a:solidFill>
               </a:rPr>
-              <a:t>🧪 Laboratorio guiado</a:t>
+              <a:t>📔 Glosario</a:t>
             </a:r>
           </a:p>
         </p:txBody>
@@ -4458,97 +4894,97 @@
                   <a:srgbClr val="22282E"/>
                 </a:solidFill>
               </a:rPr>
-              <a:t>•  Programa heapdemo.c:</a:t>
-            </a:r>
-          </a:p>
-          <a:p>
-            <a:pPr>
-              <a:spcAft>
-                <a:spcPts val="600"/>
-              </a:spcAft>
-            </a:pPr>
-            <a:r>
-              <a:rPr sz="1500">
-                <a:solidFill>
-                  <a:srgbClr val="22282E"/>
-                </a:solidFill>
-              </a:rPr>
-              <a:t>•  int main(){</a:t>
-            </a:r>
-          </a:p>
-          <a:p>
-            <a:pPr>
-              <a:spcAft>
-                <a:spcPts val="600"/>
-              </a:spcAft>
-            </a:pPr>
-            <a:r>
-              <a:rPr sz="1500">
-                <a:solidFill>
-                  <a:srgbClr val="22282E"/>
-                </a:solidFill>
-              </a:rPr>
-              <a:t>•  char a = malloc(0x30); strcpy(a,"AAAA");</a:t>
-            </a:r>
-          </a:p>
-          <a:p>
-            <a:pPr>
-              <a:spcAft>
-                <a:spcPts val="600"/>
-              </a:spcAft>
-            </a:pPr>
-            <a:r>
-              <a:rPr sz="1500">
-                <a:solidFill>
-                  <a:srgbClr val="22282E"/>
-                </a:solidFill>
-              </a:rPr>
-              <a:t>•  char b = malloc(0x30); strcpy(b,"BBBB");</a:t>
-            </a:r>
-          </a:p>
-          <a:p>
-            <a:pPr>
-              <a:spcAft>
-                <a:spcPts val="600"/>
-              </a:spcAft>
-            </a:pPr>
-            <a:r>
-              <a:rPr sz="1500">
-                <a:solidFill>
-                  <a:srgbClr val="22282E"/>
-                </a:solidFill>
-              </a:rPr>
-              <a:t>•  free(a); free(b);</a:t>
-            </a:r>
-          </a:p>
-          <a:p>
-            <a:pPr>
-              <a:spcAft>
-                <a:spcPts val="600"/>
-              </a:spcAft>
-            </a:pPr>
-            <a:r>
-              <a:rPr sz="1500">
-                <a:solidFill>
-                  <a:srgbClr val="22282E"/>
-                </a:solidFill>
-              </a:rPr>
-              <a:t>•  char c = malloc(0x30);   // reutiliza el último liberado (tcache LIFO)</a:t>
-            </a:r>
-          </a:p>
-          <a:p>
-            <a:pPr>
-              <a:spcAft>
-                <a:spcPts val="600"/>
-              </a:spcAft>
-            </a:pPr>
-            <a:r>
-              <a:rPr sz="1500">
-                <a:solidFill>
-                  <a:srgbClr val="22282E"/>
-                </a:solidFill>
-              </a:rPr>
-              <a:t>•  return 0;</a:t>
+              <a:t>•  Término — Definición concisa</a:t>
+            </a:r>
+          </a:p>
+          <a:p>
+            <a:pPr>
+              <a:spcAft>
+                <a:spcPts val="600"/>
+              </a:spcAft>
+            </a:pPr>
+            <a:r>
+              <a:rPr sz="1500">
+                <a:solidFill>
+                  <a:srgbClr val="22282E"/>
+                </a:solidFill>
+              </a:rPr>
+              <a:t>•  Heap — Región de asignación dinámica (malloc/free)</a:t>
+            </a:r>
+          </a:p>
+          <a:p>
+            <a:pPr>
+              <a:spcAft>
+                <a:spcPts val="600"/>
+              </a:spcAft>
+            </a:pPr>
+            <a:r>
+              <a:rPr sz="1500">
+                <a:solidFill>
+                  <a:srgbClr val="22282E"/>
+                </a:solidFill>
+              </a:rPr>
+              <a:t>•  Allocator — Gestor que decide dónde colocar cada asignación</a:t>
+            </a:r>
+          </a:p>
+          <a:p>
+            <a:pPr>
+              <a:spcAft>
+                <a:spcPts val="600"/>
+              </a:spcAft>
+            </a:pPr>
+            <a:r>
+              <a:rPr sz="1500">
+                <a:solidFill>
+                  <a:srgbClr val="22282E"/>
+                </a:solidFill>
+              </a:rPr>
+              <a:t>•  ptmalloc — Allocator por defecto de glibc</a:t>
+            </a:r>
+          </a:p>
+          <a:p>
+            <a:pPr>
+              <a:spcAft>
+                <a:spcPts val="600"/>
+              </a:spcAft>
+            </a:pPr>
+            <a:r>
+              <a:rPr sz="1500">
+                <a:solidFill>
+                  <a:srgbClr val="22282E"/>
+                </a:solidFill>
+              </a:rPr>
+              <a:t>•  Arena — Región del heap que atiende a un conjunto de hilos</a:t>
+            </a:r>
+          </a:p>
+          <a:p>
+            <a:pPr>
+              <a:spcAft>
+                <a:spcPts val="600"/>
+              </a:spcAft>
+            </a:pPr>
+            <a:r>
+              <a:rPr sz="1500">
+                <a:solidFill>
+                  <a:srgbClr val="22282E"/>
+                </a:solidFill>
+              </a:rPr>
+              <a:t>•  Chunk — Bloque de memoria con metadatos delante</a:t>
+            </a:r>
+          </a:p>
+          <a:p>
+            <a:pPr>
+              <a:spcAft>
+                <a:spcPts val="600"/>
+              </a:spcAft>
+            </a:pPr>
+            <a:r>
+              <a:rPr sz="1500">
+                <a:solidFill>
+                  <a:srgbClr val="22282E"/>
+                </a:solidFill>
+              </a:rPr>
+              <a:t>•  size / flags — Tamaño del chunk y bits de estado en la cabecera</a:t>
             </a:r>
           </a:p>
         </p:txBody>
@@ -4599,7 +5035,7 @@
                   <a:srgbClr val="0B3D2E"/>
                 </a:solidFill>
               </a:rPr>
-              <a:t>✍️ Ejercicios</a:t>
+              <a:t>🧰 Herramientas y preparación</a:t>
             </a:r>
           </a:p>
         </p:txBody>
@@ -4637,82 +5073,7 @@
                   <a:srgbClr val="22282E"/>
                 </a:solidFill>
               </a:rPr>
-              <a:t>•  Dibuja el layout de dos chunks contiguos indicando dónde está size de cada uno.</a:t>
-            </a:r>
-          </a:p>
-          <a:p>
-            <a:pPr>
-              <a:spcAft>
-                <a:spcPts val="600"/>
-              </a:spcAft>
-            </a:pPr>
-            <a:r>
-              <a:rPr sz="1500">
-                <a:solidFill>
-                  <a:srgbClr val="22282E"/>
-                </a:solidFill>
-              </a:rPr>
-              <a:t>•  Muestra con pwndbg el contenido del tcache tras liberar 3 chunks iguales.</a:t>
-            </a:r>
-          </a:p>
-          <a:p>
-            <a:pPr>
-              <a:spcAft>
-                <a:spcPts val="600"/>
-              </a:spcAft>
-            </a:pPr>
-            <a:r>
-              <a:rPr sz="1500">
-                <a:solidFill>
-                  <a:srgbClr val="22282E"/>
-                </a:solidFill>
-              </a:rPr>
-              <a:t>•  Explica por qué tcache es LIFO y qué implica para la reutilización.</a:t>
-            </a:r>
-          </a:p>
-          <a:p>
-            <a:pPr>
-              <a:spcAft>
-                <a:spcPts val="600"/>
-              </a:spcAft>
-            </a:pPr>
-            <a:r>
-              <a:rPr sz="1500">
-                <a:solidFill>
-                  <a:srgbClr val="22282E"/>
-                </a:solidFill>
-              </a:rPr>
-              <a:t>•  Reserva un chunk &gt; 0x408 y observa a qué bin va al liberarlo.</a:t>
-            </a:r>
-          </a:p>
-          <a:p>
-            <a:pPr>
-              <a:spcAft>
-                <a:spcPts val="600"/>
-              </a:spcAft>
-            </a:pPr>
-            <a:r>
-              <a:rPr sz="1500">
-                <a:solidFill>
-                  <a:srgbClr val="22282E"/>
-                </a:solidFill>
-              </a:rPr>
-              <a:t>•  Localiza el top chunk y su size en visheapchunks.</a:t>
-            </a:r>
-          </a:p>
-          <a:p>
-            <a:pPr>
-              <a:spcAft>
-                <a:spcPts val="600"/>
-              </a:spcAft>
-            </a:pPr>
-            <a:r>
-              <a:rPr sz="1500">
-                <a:solidFill>
-                  <a:srgbClr val="22282E"/>
-                </a:solidFill>
-              </a:rPr>
-              <a:t>•  Identifica el next de un chunk en tcache (dónde apunta).</a:t>
+              <a:t>•  Compila un programa de práctica que reserve y libere chunks con malloc/free.</a:t>
             </a:r>
           </a:p>
         </p:txBody>
@@ -4763,7 +5124,7 @@
                   <a:srgbClr val="0B3D2E"/>
                 </a:solidFill>
               </a:rPr>
-              <a:t>📝 Reto verificable</a:t>
+              <a:t>🧪 Laboratorio guiado</a:t>
             </a:r>
           </a:p>
         </p:txBody>
@@ -4801,52 +5162,97 @@
                   <a:srgbClr val="22282E"/>
                 </a:solidFill>
               </a:rPr>
-              <a:t>•  Con un programa que reserve y libere varios chunks, demuestra en pwndbg que el tcache es LIFO</a:t>
-            </a:r>
-          </a:p>
-          <a:p>
-            <a:pPr>
-              <a:spcAft>
-                <a:spcPts val="600"/>
-              </a:spcAft>
-            </a:pPr>
-            <a:r>
-              <a:rPr sz="1500">
-                <a:solidFill>
-                  <a:srgbClr val="22282E"/>
-                </a:solidFill>
-              </a:rPr>
-              <a:t>•  prediciendo qué dirección devolverá el siguiente malloc.</a:t>
-            </a:r>
-          </a:p>
-          <a:p>
-            <a:pPr>
-              <a:spcAft>
-                <a:spcPts val="600"/>
-              </a:spcAft>
-            </a:pPr>
-            <a:r>
-              <a:rPr sz="1500">
-                <a:solidFill>
-                  <a:srgbClr val="22282E"/>
-                </a:solidFill>
-              </a:rPr>
-              <a:t>•  Criterio de aceptación: predices correctamente la dirección devuelta por un malloc posterior</a:t>
-            </a:r>
-          </a:p>
-          <a:p>
-            <a:pPr>
-              <a:spcAft>
-                <a:spcPts val="600"/>
-              </a:spcAft>
-            </a:pPr>
-            <a:r>
-              <a:rPr sz="1500">
-                <a:solidFill>
-                  <a:srgbClr val="22282E"/>
-                </a:solidFill>
-              </a:rPr>
-              <a:t>•  basándote en el estado del tcache mostrado por bins.</a:t>
+              <a:t>•  Programa heapdemo.c:</a:t>
+            </a:r>
+          </a:p>
+          <a:p>
+            <a:pPr>
+              <a:spcAft>
+                <a:spcPts val="600"/>
+              </a:spcAft>
+            </a:pPr>
+            <a:r>
+              <a:rPr sz="1500">
+                <a:solidFill>
+                  <a:srgbClr val="22282E"/>
+                </a:solidFill>
+              </a:rPr>
+              <a:t>•  Depura en pwndbg poniendo breakpoints tras cada malloc/free:</a:t>
+            </a:r>
+          </a:p>
+          <a:p>
+            <a:pPr>
+              <a:spcAft>
+                <a:spcPts val="600"/>
+              </a:spcAft>
+            </a:pPr>
+            <a:r>
+              <a:rPr sz="1500">
+                <a:solidFill>
+                  <a:srgbClr val="22282E"/>
+                </a:solidFill>
+              </a:rPr>
+              <a:t>•  Tras los dos free, observa bins y verás a y b en el tcache del tamaño 0x40.</a:t>
+            </a:r>
+          </a:p>
+          <a:p>
+            <a:pPr>
+              <a:spcAft>
+                <a:spcPts val="600"/>
+              </a:spcAft>
+            </a:pPr>
+            <a:r>
+              <a:rPr sz="1500">
+                <a:solidFill>
+                  <a:srgbClr val="22282E"/>
+                </a:solidFill>
+              </a:rPr>
+              <a:t>•  Comprueba el orden LIFO: c reutiliza la dirección de b (el último liberado).</a:t>
+            </a:r>
+          </a:p>
+          <a:p>
+            <a:pPr>
+              <a:spcAft>
+                <a:spcPts val="600"/>
+              </a:spcAft>
+            </a:pPr>
+            <a:r>
+              <a:rPr sz="1500">
+                <a:solidFill>
+                  <a:srgbClr val="22282E"/>
+                </a:solidFill>
+              </a:rPr>
+              <a:t>•  Examina la cabecera de un chunk con x/4gx &lt;dirchunk-0x10&gt; e identifica prevsize y size</a:t>
+            </a:r>
+          </a:p>
+          <a:p>
+            <a:pPr>
+              <a:spcAft>
+                <a:spcPts val="600"/>
+              </a:spcAft>
+            </a:pPr>
+            <a:r>
+              <a:rPr sz="1500">
+                <a:solidFill>
+                  <a:srgbClr val="22282E"/>
+                </a:solidFill>
+              </a:rPr>
+              <a:t>•  (con el bit PREVINUSE).</a:t>
+            </a:r>
+          </a:p>
+          <a:p>
+            <a:pPr>
+              <a:spcAft>
+                <a:spcPts val="600"/>
+              </a:spcAft>
+            </a:pPr>
+            <a:r>
+              <a:rPr sz="1500">
+                <a:solidFill>
+                  <a:srgbClr val="22282E"/>
+                </a:solidFill>
+              </a:rPr>
+              <a:t>•  Repite reservando chunks grandes (0x500) para verlos ir al unsorted/large bin y nota los punteros</a:t>
             </a:r>
           </a:p>
         </p:txBody>
